--- a/mavenprojectSCR/pie-chart-demo-outputpre.pptx
+++ b/mavenprojectSCR/pie-chart-demo-outputpre.pptx
@@ -147,8 +147,6 @@
           <c:dLbls>
             <c:dLblPos val="outEnd"/>
             <c:showLegendKey val="false"/>
-            <c:showVal val="true"/>
-            <c:showCatName val="true"/>
             <c:showPercent val="true"/>
           </c:dLbls>
           <c:cat>
@@ -204,6 +202,9 @@
         </c:dLbls>
         <c:firstSliceAng val="0"/>
       </c:pieChart>
+      <c:pie3DChart>
+        <c:varyColors val="true"/>
+      </c:pie3DChart>
     </c:plotArea>
     <c:legend>
       <c:legendPos val="r"/>
